--- a/cascade_trophique.pptx
+++ b/cascade_trophique.pptx
@@ -4641,11 +4641,8 @@
           <a:bodyPr wrap="square" rtlCol="0" anchor="ctr"/>
           <a:lstStyle/>
           <a:p>
-            <a:pPr marL="0" indent="0">
-              <a:buNone/>
-            </a:pPr>
-            <a:r>
-              <a:rPr lang="en-US" sz="850" dirty="0">
+            <a:r>
+              <a:rPr lang="fr-FR" sz="850" dirty="0">
                 <a:solidFill>
                   <a:srgbClr val="AABB88"/>
                 </a:solidFill>
@@ -4653,9 +4650,30 @@
                 <a:ea typeface="Calibri" pitchFamily="34" charset="-122"/>
                 <a:cs typeface="Calibri" pitchFamily="34" charset="-120"/>
               </a:rPr>
-              <a:t>Oscillations saisonnières (T=1 an) + dynamique lente ours. Euler implicite et Crank-Nicolson permettent h = 0.05 là où Euler expl. nécessite h ≤ 0.01.</a:t>
-            </a:r>
-            <a:endParaRPr lang="en-US" sz="850" dirty="0"/>
+              <a:t>Oscillations saisonnières (T=1 an) + dynamique lente ours. Euler implicite et </a:t>
+            </a:r>
+            <a:r>
+              <a:rPr lang="fr-FR" sz="850" dirty="0" err="1">
+                <a:solidFill>
+                  <a:srgbClr val="AABB88"/>
+                </a:solidFill>
+                <a:latin typeface="Calibri" pitchFamily="34" charset="0"/>
+                <a:ea typeface="Calibri" pitchFamily="34" charset="-122"/>
+                <a:cs typeface="Calibri" pitchFamily="34" charset="-120"/>
+              </a:rPr>
+              <a:t>Crank-Nicolson</a:t>
+            </a:r>
+            <a:r>
+              <a:rPr lang="fr-FR" sz="850" dirty="0">
+                <a:solidFill>
+                  <a:srgbClr val="AABB88"/>
+                </a:solidFill>
+                <a:latin typeface="Calibri" pitchFamily="34" charset="0"/>
+                <a:ea typeface="Calibri" pitchFamily="34" charset="-122"/>
+                <a:cs typeface="Calibri" pitchFamily="34" charset="-120"/>
+              </a:rPr>
+              <a:t> permettent h = 0.5 là où Euler explicite nécessite h ≤ 0.005 pour une précision acceptable</a:t>
+            </a:r>
           </a:p>
         </p:txBody>
       </p:sp>
@@ -9848,9 +9866,6 @@
             <a:endParaRPr lang="en-US" sz="900" dirty="0"/>
           </a:p>
           <a:p>
-            <a:pPr marL="0" indent="0">
-              <a:buNone/>
-            </a:pPr>
             <a:r>
               <a:rPr lang="en-US" sz="900" dirty="0">
                 <a:solidFill>
@@ -9860,7 +9875,18 @@
                 <a:ea typeface="Calibri" pitchFamily="34" charset="-122"/>
                 <a:cs typeface="Calibri" pitchFamily="34" charset="-120"/>
               </a:rPr>
-              <a:t>Conditionnellement stable. Pas h ≤ 0.01 requis. 1 éval. F/pas.</a:t>
+              <a:t>Conditionnellement stable. </a:t>
+            </a:r>
+            <a:r>
+              <a:rPr lang="fr-FR" sz="900" dirty="0">
+                <a:solidFill>
+                  <a:srgbClr val="AABBAA"/>
+                </a:solidFill>
+                <a:latin typeface="Calibri" pitchFamily="34" charset="0"/>
+                <a:ea typeface="Calibri" pitchFamily="34" charset="-122"/>
+                <a:cs typeface="Calibri" pitchFamily="34" charset="-120"/>
+              </a:rPr>
+              <a:t>Pour une précision &lt; 1%, il faut h ≤ 0.005. À h = 0.5, stable mais erreur de phase +2.5% sur les loups.</a:t>
             </a:r>
             <a:endParaRPr lang="en-US" sz="900" dirty="0"/>
           </a:p>
@@ -13214,36 +13240,12 @@
                 <a:ea typeface="Consolas" pitchFamily="34" charset="-122"/>
                 <a:cs typeface="Consolas" pitchFamily="34" charset="-120"/>
               </a:rPr>
-              <a:t>RK4 (h=0.005) · Euler explicite (h=0.005) · Euler implicite (h=0.05) · Crank-Nicolson (h=0.05)</a:t>
+              <a:t>RK4 (h=0.005) · Euler explicite (h=0.5) · Euler implicite (h=0.5) · Crank-Nicolson (h=0.5)</a:t>
             </a:r>
             <a:endParaRPr lang="en-US" sz="950" dirty="0"/>
           </a:p>
         </p:txBody>
       </p:sp>
-      <p:pic>
-        <p:nvPicPr>
-          <p:cNvPr id="5" name="Image 0" descr="preencoded.png"/>
-          <p:cNvPicPr>
-            <a:picLocks noChangeAspect="1"/>
-          </p:cNvPicPr>
-          <p:nvPr/>
-        </p:nvPicPr>
-        <p:blipFill>
-          <a:blip r:embed="rId3"/>
-          <a:stretch>
-            <a:fillRect/>
-          </a:stretch>
-        </p:blipFill>
-        <p:spPr>
-          <a:xfrm>
-            <a:off x="228600" y="960120"/>
-            <a:ext cx="5074920" cy="3977640"/>
-          </a:xfrm>
-          <a:prstGeom prst="rect">
-            <a:avLst/>
-          </a:prstGeom>
-        </p:spPr>
-      </p:pic>
       <p:sp>
         <p:nvSpPr>
           <p:cNvPr id="6" name="Shape 3"/>
@@ -13414,11 +13416,8 @@
           <a:bodyPr wrap="square" rtlCol="0" anchor="t"/>
           <a:lstStyle/>
           <a:p>
-            <a:pPr marL="0" indent="0">
-              <a:buNone/>
-            </a:pPr>
-            <a:r>
-              <a:rPr lang="en-US" sz="950" dirty="0">
+            <a:r>
+              <a:rPr lang="fr-FR" sz="950" dirty="0">
                 <a:solidFill>
                   <a:srgbClr val="64748B"/>
                 </a:solidFill>
@@ -13426,7 +13425,7 @@
                 <a:ea typeface="Calibri" pitchFamily="34" charset="-122"/>
                 <a:cs typeface="Calibri" pitchFamily="34" charset="-120"/>
               </a:rPr>
-              <a:t>RK4 et Euler explicite (h = 0.005) : trajectoires identiques — validation croisée.</a:t>
+              <a:t> RK4 (h=0.005) sert de référence quasi-exacte (erreur &lt; 10⁻¹⁰)</a:t>
             </a:r>
             <a:endParaRPr lang="en-US" sz="950" dirty="0"/>
           </a:p>
@@ -13504,7 +13503,7 @@
                 <a:ea typeface="Calibri" pitchFamily="34" charset="-122"/>
                 <a:cs typeface="Calibri" pitchFamily="34" charset="-120"/>
               </a:rPr>
-              <a:t>Euler implicite (h = 0.05) : stabilité parfaite avec un pas 10× plus grand.</a:t>
+              <a:t>Euler implicite (h = 0.5) : stabilité parfaite avec un pas 100× plus grand.</a:t>
             </a:r>
             <a:endParaRPr lang="en-US" sz="950" dirty="0"/>
           </a:p>
@@ -13582,7 +13581,7 @@
                 <a:ea typeface="Calibri" pitchFamily="34" charset="-122"/>
                 <a:cs typeface="Calibri" pitchFamily="34" charset="-120"/>
               </a:rPr>
-              <a:t>Crank-Nicolson (h = 0.05) : se superpose à RK4 — ordre 2, pas large.</a:t>
+              <a:t>Crank-Nicolson (h = 0.5) : se superpose à RK4. Ordre 2, pas large.</a:t>
             </a:r>
             <a:endParaRPr lang="en-US" sz="950" dirty="0"/>
           </a:p>
@@ -13648,11 +13647,8 @@
           <a:bodyPr wrap="square" rtlCol="0" anchor="t"/>
           <a:lstStyle/>
           <a:p>
-            <a:pPr marL="0" indent="0">
-              <a:buNone/>
-            </a:pPr>
-            <a:r>
-              <a:rPr lang="en-US" sz="950" dirty="0">
+            <a:r>
+              <a:rPr lang="fr-FR" sz="950" dirty="0">
                 <a:solidFill>
                   <a:srgbClr val="64748B"/>
                 </a:solidFill>
@@ -13660,7 +13656,7 @@
                 <a:ea typeface="Calibri" pitchFamily="34" charset="-122"/>
                 <a:cs typeface="Calibri" pitchFamily="34" charset="-120"/>
               </a:rPr>
-              <a:t>Les 4 courbes sont indiscernables à l'échelle du graphe : cohérence des implémentations.</a:t>
+              <a:t>À h=0.5, Euler explicite/implicite montrent ±2.5% d'erreur de phase visible sur les loups</a:t>
             </a:r>
             <a:endParaRPr lang="en-US" sz="950" dirty="0"/>
           </a:p>
@@ -13726,11 +13722,8 @@
           <a:bodyPr wrap="square" rtlCol="0" anchor="t"/>
           <a:lstStyle/>
           <a:p>
-            <a:pPr marL="0" indent="0">
-              <a:buNone/>
-            </a:pPr>
-            <a:r>
-              <a:rPr lang="en-US" sz="950" dirty="0">
+            <a:r>
+              <a:rPr lang="fr-FR" sz="950" dirty="0">
                 <a:solidFill>
                   <a:srgbClr val="64748B"/>
                 </a:solidFill>
@@ -13738,12 +13731,42 @@
                 <a:ea typeface="Calibri" pitchFamily="34" charset="-122"/>
                 <a:cs typeface="Calibri" pitchFamily="34" charset="-120"/>
               </a:rPr>
-              <a:t>Euler explicite seul avec h = 0.05 produirait des instabilités numériques sur ce système raide.</a:t>
+              <a:t>Euler explicite reste stable jusqu'à h ≈ 1.0 an. À h = 0.5 les erreurs de phase sont visibles sur les loups. CN les annule par symétrie temporelle.</a:t>
             </a:r>
             <a:endParaRPr lang="en-US" sz="950" dirty="0"/>
           </a:p>
         </p:txBody>
       </p:sp>
+      <p:pic>
+        <p:nvPicPr>
+          <p:cNvPr id="20" name="Picture 19">
+            <a:extLst>
+              <a:ext uri="{FF2B5EF4-FFF2-40B4-BE49-F238E27FC236}">
+                <a16:creationId xmlns:a16="http://schemas.microsoft.com/office/drawing/2014/main" id="{C941DFD4-1D3C-2B0D-AF98-6D76310AE907}"/>
+              </a:ext>
+            </a:extLst>
+          </p:cNvPr>
+          <p:cNvPicPr>
+            <a:picLocks noChangeAspect="1"/>
+          </p:cNvPicPr>
+          <p:nvPr/>
+        </p:nvPicPr>
+        <p:blipFill>
+          <a:blip r:embed="rId3"/>
+          <a:stretch>
+            <a:fillRect/>
+          </a:stretch>
+        </p:blipFill>
+        <p:spPr>
+          <a:xfrm>
+            <a:off x="671182" y="892007"/>
+            <a:ext cx="3531077" cy="4148273"/>
+          </a:xfrm>
+          <a:prstGeom prst="rect">
+            <a:avLst/>
+          </a:prstGeom>
+        </p:spPr>
+      </p:pic>
     </p:spTree>
   </p:cSld>
   <p:clrMapOvr>
